--- a/public/fun/pack/pptx/birthdaypro/돌잔치프리미엄_03_사진중심_세이지크림.pptx
+++ b/public/fun/pack/pptx/birthdaypro/돌잔치프리미엄_03_사진중심_세이지크림.pptx
@@ -112,12 +112,12 @@
   <p:extLst>
     <p:ext uri="{521415D9-36F7-43E2-AB2F-B90AF26B5E84}">
       <p14:sectionLst xmlns:p14="http://schemas.microsoft.com/office/powerpoint/2010/main">
-        <p14:section name="시작" id="{86B76FCC-CDEE-4DC0-86F2-725D5FE00699}">
+        <p14:section name="시작" id="{8E73CAE7-00B2-4CC8-BD68-2552E12A5705}">
           <p14:sldIdLst>
             <p14:sldId id="256"/>
           </p14:sldIdLst>
         </p14:section>
-        <p14:section name="본문" id="{5185CE0C-BEB3-4D17-80B5-D7779804D91C}">
+        <p14:section name="본문" id="{67DB0EED-0FD8-46A4-8DAE-841CDD20D1F0}">
           <p14:sldIdLst>
             <p14:sldId id="257"/>
             <p14:sldId id="258"/>
@@ -125,7 +125,7 @@
             <p14:sldId id="260"/>
           </p14:sldIdLst>
         </p14:section>
-        <p14:section name="마무리" id="{9049A7B4-373C-4DDA-A4D5-00A85BDBDEA5}">
+        <p14:section name="마무리" id="{161C2A4B-EA20-48AB-AD5A-2689092CABDB}">
           <p14:sldIdLst>
             <p14:sldId id="261"/>
           </p14:sldIdLst>
@@ -1494,7 +1494,7 @@
             </a:lvl1pPr>
           </a:lstStyle>
           <a:p>
-            <a:fld id="{74B92F7F-35C9-46C4-B014-88CA40BFCB83}" type="slidenum">
+            <a:fld id="{3A38D2B9-DE4F-4E64-894B-2C83BEB7B027}" type="slidenum">
               <a:rPr lang="en-US"/>
               <a:t>‹#›</a:t>
             </a:fld>
@@ -2202,7 +2202,7 @@
             </a:lvl1pPr>
           </a:lstStyle>
           <a:p>
-            <a:fld id="{D11515AF-212D-4C20-BC0C-FCD5DAA9D8F8}" type="slidenum">
+            <a:fld id="{F078ABC0-1855-4A33-B485-5649609656D1}" type="slidenum">
               <a:rPr lang="en-US"/>
               <a:t>‹#›</a:t>
             </a:fld>
@@ -2880,7 +2880,7 @@
             </a:lvl1pPr>
           </a:lstStyle>
           <a:p>
-            <a:fld id="{CC84D5C7-2DC4-4D4A-A507-673BC507BD9E}" type="slidenum">
+            <a:fld id="{639684E5-0A84-45FE-AC63-4FF6F0612921}" type="slidenum">
               <a:rPr lang="en-US"/>
               <a:t>‹#›</a:t>
             </a:fld>
@@ -3743,7 +3743,7 @@
           <a:p>
             <a:r>
               <a:rPr lang="ko-KR"/>
-              <a:t>아기 이름 · 0000. 00. 00</a:t>
+              <a:t>아기 이름 · 날짜 입력</a:t>
             </a:r>
           </a:p>
           <a:p>
@@ -3904,7 +3904,7 @@
           <a:bodyPr/>
           <a:lstStyle/>
           <a:p>
-            <a:fld id="{7CEB4406-70A5-4B61-9FDD-08EEF1FB02E3}" type="slidenum">
+            <a:fld id="{5D5E5D8C-0B1D-4F15-8672-63D3921F6973}" type="slidenum">
               <a:rPr lang="en-US"/>
               <a:t>‹#›</a:t>
             </a:fld>
@@ -4644,7 +4644,7 @@
           <a:bodyPr/>
           <a:lstStyle/>
           <a:p>
-            <a:fld id="{FA50F0B0-D4C1-413E-AABA-6A6FA683FC6D}" type="slidenum">
+            <a:fld id="{34F6A693-27A4-4ECA-91F0-6BBD4F2CC640}" type="slidenum">
               <a:rPr lang="en-US"/>
               <a:t>‹#›</a:t>
             </a:fld>
@@ -4732,7 +4732,7 @@
           <a:bodyPr/>
           <a:lstStyle/>
           <a:p>
-            <a:fld id="{D0EDD77A-4AA0-4965-AF51-E5EB86AD7CD8}" type="slidenum">
+            <a:fld id="{5024B0BA-E1F4-42FC-97EF-BF82C1525995}" type="slidenum">
               <a:rPr lang="en-US"/>
               <a:t>‹#›</a:t>
             </a:fld>
@@ -6113,7 +6113,7 @@
           <a:bodyPr/>
           <a:lstStyle/>
           <a:p>
-            <a:fld id="{326F8D90-08F2-40D8-A83B-FAB1571D1EDE}" type="slidenum">
+            <a:fld id="{FC322403-BB0D-40AB-BD1D-7D393F704904}" type="slidenum">
               <a:rPr lang="en-US"/>
               <a:t>‹#›</a:t>
             </a:fld>
